--- a/assets/figures-editable/c3-c4/c4-e03.pptx
+++ b/assets/figures-editable/c3-c4/c4-e03.pptx
@@ -3104,8 +3104,8 @@
         </p:nvSpPr>
         <p:spPr>
           <a:xfrm>
-            <a:off x="274320" y="137160"/>
-            <a:ext cx="11612880" cy="365760"/>
+            <a:off x="274320" y="118872"/>
+            <a:ext cx="11612880" cy="340105"/>
           </a:xfrm>
           <a:prstGeom prst="rect">
             <a:avLst/>
@@ -3114,7 +3114,7 @@
           <a:effectLst/>
         </p:spPr>
         <p:txBody>
-          <a:bodyPr wrap="square" lIns="27432" rIns="27432" tIns="18288" bIns="18288" anchor="ctr">
+          <a:bodyPr wrap="none" lIns="18288" rIns="18288" tIns="18288" bIns="18288" anchor="t">
             <a:spAutoFit/>
           </a:bodyPr>
           <a:lstStyle/>
@@ -3125,7 +3125,7 @@
               </a:spcAft>
             </a:pPr>
             <a:r>
-              <a:rPr sz="2100" b="0" i="0">
+              <a:rPr sz="1900" b="1" i="0">
                 <a:solidFill>
                   <a:srgbClr val="8EDBD4"/>
                 </a:solidFill>
@@ -3138,21 +3138,411 @@
       </p:sp>
       <p:sp>
         <p:nvSpPr>
-          <p:cNvPr id="3" name="C4-E03 rect 1" descr="sci-ppt:o001"/>
+          <p:cNvPr id="3" name="C4-E03 round_rect 1" descr="sci-ppt:o001"/>
           <p:cNvSpPr/>
           <p:nvPr/>
         </p:nvSpPr>
         <p:spPr>
           <a:xfrm>
-            <a:off x="1188720" y="1371600"/>
-            <a:ext cx="7498079" cy="1143000"/>
-          </a:xfrm>
-          <a:prstGeom prst="rect">
+            <a:off x="365760" y="914400"/>
+            <a:ext cx="5669280" cy="4846320"/>
+          </a:xfrm>
+          <a:prstGeom prst="roundRect">
             <a:avLst/>
           </a:prstGeom>
           <a:solidFill>
             <a:srgbClr val="213E4B"/>
           </a:solidFill>
+          <a:ln w="20320">
+            <a:solidFill>
+              <a:srgbClr val="8EDBD4"/>
+            </a:solidFill>
+          </a:ln>
+          <a:effectLst/>
+        </p:spPr>
+        <p:txBody>
+          <a:bodyPr rtlCol="0" anchor="ctr"/>
+          <a:lstStyle/>
+          <a:p>
+            <a:pPr algn="ctr"/>
+          </a:p>
+        </p:txBody>
+      </p:sp>
+      <p:sp>
+        <p:nvSpPr>
+          <p:cNvPr id="4" name="C4-E03 text 2" descr="sci-ppt:o002"/>
+          <p:cNvSpPr txBox="1"/>
+          <p:nvPr/>
+        </p:nvSpPr>
+        <p:spPr>
+          <a:xfrm>
+            <a:off x="475488" y="969264"/>
+            <a:ext cx="5449824" cy="254889"/>
+          </a:xfrm>
+          <a:prstGeom prst="rect">
+            <a:avLst/>
+          </a:prstGeom>
+          <a:noFill/>
+          <a:effectLst/>
+        </p:spPr>
+        <p:txBody>
+          <a:bodyPr wrap="none" lIns="18288" rIns="18288" tIns="18288" bIns="18288" anchor="t">
+            <a:spAutoFit/>
+          </a:bodyPr>
+          <a:lstStyle/>
+          <a:p>
+            <a:pPr algn="l">
+              <a:spcAft>
+                <a:spcPts val="0"/>
+              </a:spcAft>
+            </a:pPr>
+            <a:r>
+              <a:rPr sz="1350" b="1" i="0">
+                <a:solidFill>
+                  <a:srgbClr val="8EDBD4"/>
+                </a:solidFill>
+                <a:latin typeface="Arial"/>
+              </a:rPr>
+              <a:t>One film, two thickness integrals</a:t>
+            </a:r>
+          </a:p>
+        </p:txBody>
+      </p:sp>
+      <p:sp>
+        <p:nvSpPr>
+          <p:cNvPr id="5" name="C4-E03 rect 3" descr="sci-ppt:o003"/>
+          <p:cNvSpPr/>
+          <p:nvPr/>
+        </p:nvSpPr>
+        <p:spPr>
+          <a:xfrm>
+            <a:off x="914400" y="2011680"/>
+            <a:ext cx="3291840" cy="2194560"/>
+          </a:xfrm>
+          <a:prstGeom prst="rect">
+            <a:avLst/>
+          </a:prstGeom>
+          <a:solidFill>
+            <a:srgbClr val="1E4A5A"/>
+          </a:solidFill>
+          <a:ln w="25400">
+            <a:solidFill>
+              <a:srgbClr val="8EDBD4"/>
+            </a:solidFill>
+          </a:ln>
+          <a:effectLst/>
+        </p:spPr>
+        <p:txBody>
+          <a:bodyPr rtlCol="0" anchor="ctr"/>
+          <a:lstStyle/>
+          <a:p>
+            <a:pPr algn="ctr"/>
+          </a:p>
+        </p:txBody>
+      </p:sp>
+      <p:cxnSp>
+        <p:nvCxnSpPr>
+          <p:cNvPr id="6" name="C4-E03 line 4" descr="sci-ppt:o004"/>
+          <p:cNvCxnSpPr/>
+          <p:nvPr/>
+        </p:nvCxnSpPr>
+        <p:spPr>
+          <a:xfrm>
+            <a:off x="4434840" y="2011680"/>
+            <a:ext cx="0" cy="2194560"/>
+          </a:xfrm>
+          <a:prstGeom prst="line">
+            <a:avLst/>
+          </a:prstGeom>
+          <a:ln w="16510">
+            <a:solidFill>
+              <a:srgbClr val="B4C7D2"/>
+            </a:solidFill>
+          </a:ln>
+          <a:effectLst/>
+        </p:spPr>
+      </p:cxnSp>
+      <p:cxnSp>
+        <p:nvCxnSpPr>
+          <p:cNvPr id="7" name="C4-E03 line 5" descr="sci-ppt:o005"/>
+          <p:cNvCxnSpPr/>
+          <p:nvPr/>
+        </p:nvCxnSpPr>
+        <p:spPr>
+          <a:xfrm flipH="1">
+            <a:off x="4370831" y="2011680"/>
+            <a:ext cx="128017" cy="0"/>
+          </a:xfrm>
+          <a:prstGeom prst="line">
+            <a:avLst/>
+          </a:prstGeom>
+          <a:ln w="16510">
+            <a:solidFill>
+              <a:srgbClr val="B4C7D2"/>
+            </a:solidFill>
+          </a:ln>
+          <a:effectLst/>
+        </p:spPr>
+      </p:cxnSp>
+      <p:cxnSp>
+        <p:nvCxnSpPr>
+          <p:cNvPr id="8" name="C4-E03 line 6" descr="sci-ppt:o006"/>
+          <p:cNvCxnSpPr/>
+          <p:nvPr/>
+        </p:nvCxnSpPr>
+        <p:spPr>
+          <a:xfrm flipH="1">
+            <a:off x="4370831" y="4206240"/>
+            <a:ext cx="128017" cy="0"/>
+          </a:xfrm>
+          <a:prstGeom prst="line">
+            <a:avLst/>
+          </a:prstGeom>
+          <a:ln w="16510">
+            <a:solidFill>
+              <a:srgbClr val="B4C7D2"/>
+            </a:solidFill>
+          </a:ln>
+          <a:effectLst/>
+        </p:spPr>
+      </p:cxnSp>
+      <p:sp>
+        <p:nvSpPr>
+          <p:cNvPr id="9" name="C4-E03 text 7" descr="sci-ppt:o007"/>
+          <p:cNvSpPr txBox="1"/>
+          <p:nvPr/>
+        </p:nvSpPr>
+        <p:spPr>
+          <a:xfrm>
+            <a:off x="3337559" y="3017520"/>
+            <a:ext cx="1828800" cy="231648"/>
+          </a:xfrm>
+          <a:prstGeom prst="rect">
+            <a:avLst/>
+          </a:prstGeom>
+          <a:noFill/>
+          <a:effectLst/>
+        </p:spPr>
+        <p:txBody>
+          <a:bodyPr wrap="none" lIns="18288" rIns="18288" tIns="18288" bIns="18288" anchor="t">
+            <a:spAutoFit/>
+          </a:bodyPr>
+          <a:lstStyle/>
+          <a:p>
+            <a:pPr algn="ctr">
+              <a:spcAft>
+                <a:spcPts val="0"/>
+              </a:spcAft>
+            </a:pPr>
+            <a:r>
+              <a:rPr sz="1200" b="0" i="0">
+                <a:solidFill>
+                  <a:srgbClr val="B4C7D2"/>
+                </a:solidFill>
+                <a:latin typeface="Arial"/>
+              </a:rPr>
+              <a:t>h_f</a:t>
+            </a:r>
+          </a:p>
+        </p:txBody>
+      </p:sp>
+      <p:cxnSp>
+        <p:nvCxnSpPr>
+          <p:cNvPr id="10" name="C4-E03 line 8" descr="sci-ppt:o008"/>
+          <p:cNvCxnSpPr/>
+          <p:nvPr/>
+        </p:nvCxnSpPr>
+        <p:spPr>
+          <a:xfrm>
+            <a:off x="914400" y="3108960"/>
+            <a:ext cx="3291840" cy="0"/>
+          </a:xfrm>
+          <a:prstGeom prst="line">
+            <a:avLst/>
+          </a:prstGeom>
+          <a:ln w="15240">
+            <a:solidFill>
+              <a:srgbClr val="B4C7D2"/>
+            </a:solidFill>
+            <a:prstDash val="dash"/>
+          </a:ln>
+          <a:effectLst/>
+        </p:spPr>
+      </p:cxnSp>
+      <p:sp>
+        <p:nvSpPr>
+          <p:cNvPr id="11" name="C4-E03 text 9" descr="sci-ppt:o009"/>
+          <p:cNvSpPr txBox="1"/>
+          <p:nvPr/>
+        </p:nvSpPr>
+        <p:spPr>
+          <a:xfrm>
+            <a:off x="1188720" y="3154680"/>
+            <a:ext cx="1371600" cy="216153"/>
+          </a:xfrm>
+          <a:prstGeom prst="rect">
+            <a:avLst/>
+          </a:prstGeom>
+          <a:noFill/>
+          <a:effectLst/>
+        </p:spPr>
+        <p:txBody>
+          <a:bodyPr wrap="none" lIns="18288" rIns="18288" tIns="18288" bIns="18288" anchor="t">
+            <a:spAutoFit/>
+          </a:bodyPr>
+          <a:lstStyle/>
+          <a:p>
+            <a:pPr algn="l">
+              <a:spcAft>
+                <a:spcPts val="0"/>
+              </a:spcAft>
+            </a:pPr>
+            <a:r>
+              <a:rPr sz="1100" b="0" i="0">
+                <a:solidFill>
+                  <a:srgbClr val="B4C7D2"/>
+                </a:solidFill>
+                <a:latin typeface="Arial"/>
+              </a:rPr>
+              <a:t>mid-plane</a:t>
+            </a:r>
+          </a:p>
+        </p:txBody>
+      </p:sp>
+      <p:sp>
+        <p:nvSpPr>
+          <p:cNvPr id="12" name="C4-E03 text 10" descr="sci-ppt:o010"/>
+          <p:cNvSpPr txBox="1"/>
+          <p:nvPr/>
+        </p:nvSpPr>
+        <p:spPr>
+          <a:xfrm>
+            <a:off x="1097280" y="2148840"/>
+            <a:ext cx="2743200" cy="223900"/>
+          </a:xfrm>
+          <a:prstGeom prst="rect">
+            <a:avLst/>
+          </a:prstGeom>
+          <a:noFill/>
+          <a:effectLst/>
+        </p:spPr>
+        <p:txBody>
+          <a:bodyPr wrap="none" lIns="18288" rIns="18288" tIns="18288" bIns="18288" anchor="t">
+            <a:spAutoFit/>
+          </a:bodyPr>
+          <a:lstStyle/>
+          <a:p>
+            <a:pPr algn="l">
+              <a:spcAft>
+                <a:spcPts val="0"/>
+              </a:spcAft>
+            </a:pPr>
+            <a:r>
+              <a:rPr sz="1150" b="0" i="0">
+                <a:solidFill>
+                  <a:srgbClr val="E7F0F3"/>
+                </a:solidFill>
+                <a:latin typeface="Arial"/>
+              </a:rPr>
+              <a:t>density ρ_f is uniform</a:t>
+            </a:r>
+          </a:p>
+        </p:txBody>
+      </p:sp>
+      <p:sp>
+        <p:nvSpPr>
+          <p:cNvPr id="13" name="C4-E03 text 11" descr="sci-ppt:o011"/>
+          <p:cNvSpPr txBox="1"/>
+          <p:nvPr/>
+        </p:nvSpPr>
+        <p:spPr>
+          <a:xfrm>
+            <a:off x="548640" y="4572000"/>
+            <a:ext cx="5303520" cy="247142"/>
+          </a:xfrm>
+          <a:prstGeom prst="rect">
+            <a:avLst/>
+          </a:prstGeom>
+          <a:noFill/>
+          <a:effectLst/>
+        </p:spPr>
+        <p:txBody>
+          <a:bodyPr wrap="none" lIns="18288" rIns="18288" tIns="18288" bIns="18288" anchor="t">
+            <a:spAutoFit/>
+          </a:bodyPr>
+          <a:lstStyle/>
+          <a:p>
+            <a:pPr algn="l">
+              <a:spcAft>
+                <a:spcPts val="0"/>
+              </a:spcAft>
+            </a:pPr>
+            <a:r>
+              <a:rPr sz="1300" b="1" i="0">
+                <a:solidFill>
+                  <a:srgbClr val="8EDBD4"/>
+                </a:solidFill>
+                <a:latin typeface="Arial"/>
+              </a:rPr>
+              <a:t>m_A = ∫ρ_f dz = ρ_f h_f</a:t>
+            </a:r>
+          </a:p>
+        </p:txBody>
+      </p:sp>
+      <p:sp>
+        <p:nvSpPr>
+          <p:cNvPr id="14" name="C4-E03 text 12" descr="sci-ppt:o012"/>
+          <p:cNvSpPr txBox="1"/>
+          <p:nvPr/>
+        </p:nvSpPr>
+        <p:spPr>
+          <a:xfrm>
+            <a:off x="548640" y="5029200"/>
+            <a:ext cx="5303520" cy="239395"/>
+          </a:xfrm>
+          <a:prstGeom prst="rect">
+            <a:avLst/>
+          </a:prstGeom>
+          <a:noFill/>
+          <a:effectLst/>
+        </p:spPr>
+        <p:txBody>
+          <a:bodyPr wrap="none" lIns="18288" rIns="18288" tIns="18288" bIns="18288" anchor="t">
+            <a:spAutoFit/>
+          </a:bodyPr>
+          <a:lstStyle/>
+          <a:p>
+            <a:pPr algn="l">
+              <a:spcAft>
+                <a:spcPts val="0"/>
+              </a:spcAft>
+            </a:pPr>
+            <a:r>
+              <a:rPr sz="1250" b="1" i="0">
+                <a:solidFill>
+                  <a:srgbClr val="F2B880"/>
+                </a:solidFill>
+                <a:latin typeface="Arial"/>
+              </a:rPr>
+              <a:t>D_f = E_f/(1−ν²) ∫z² dz = E_f h_f³ / [12(1−ν_f²)]</a:t>
+            </a:r>
+          </a:p>
+        </p:txBody>
+      </p:sp>
+      <p:cxnSp>
+        <p:nvCxnSpPr>
+          <p:cNvPr id="15" name="C4-E03 line 13" descr="sci-ppt:o013"/>
+          <p:cNvCxnSpPr/>
+          <p:nvPr/>
+        </p:nvCxnSpPr>
+        <p:spPr>
+          <a:xfrm>
+            <a:off x="6583680" y="4663440"/>
+            <a:ext cx="2377440" cy="0"/>
+          </a:xfrm>
+          <a:prstGeom prst="line">
+            <a:avLst/>
+          </a:prstGeom>
           <a:ln w="19050">
             <a:solidFill>
               <a:srgbClr val="B4C7D2"/>
@@ -3160,31 +3550,24 @@
           </a:ln>
           <a:effectLst/>
         </p:spPr>
-        <p:txBody>
-          <a:bodyPr rtlCol="0" anchor="ctr"/>
-          <a:lstStyle/>
-          <a:p>
-            <a:pPr algn="ctr"/>
-          </a:p>
-        </p:txBody>
-      </p:sp>
+      </p:cxnSp>
       <p:cxnSp>
         <p:nvCxnSpPr>
-          <p:cNvPr id="4" name="C4-E03 line 2" descr="sci-ppt:o002"/>
+          <p:cNvPr id="16" name="C4-E03 line 14" descr="sci-ppt:o014"/>
           <p:cNvCxnSpPr/>
           <p:nvPr/>
         </p:nvCxnSpPr>
         <p:spPr>
           <a:xfrm>
-            <a:off x="1005840" y="1943100"/>
-            <a:ext cx="7955280" cy="0"/>
+            <a:off x="6583680" y="1371600"/>
+            <a:ext cx="0" cy="3291840"/>
           </a:xfrm>
           <a:prstGeom prst="line">
             <a:avLst/>
           </a:prstGeom>
-          <a:ln w="25400">
+          <a:ln w="19050">
             <a:solidFill>
-              <a:srgbClr val="8EDBD4"/>
+              <a:srgbClr val="B4C7D2"/>
             </a:solidFill>
           </a:ln>
           <a:effectLst/>
@@ -3192,38 +3575,58 @@
       </p:cxnSp>
       <p:cxnSp>
         <p:nvCxnSpPr>
-          <p:cNvPr id="5" name="C4-E03 arrow 3" descr="sci-ppt:o003"/>
+          <p:cNvPr id="17" name="C4-E03 line 15" descr="sci-ppt:o015"/>
           <p:cNvCxnSpPr/>
           <p:nvPr/>
         </p:nvCxnSpPr>
         <p:spPr>
-          <a:xfrm flipV="1">
-            <a:off x="9235440" y="868680"/>
-            <a:ext cx="0" cy="1074420"/>
+          <a:xfrm>
+            <a:off x="6583680" y="4663440"/>
+            <a:ext cx="0" cy="64008"/>
           </a:xfrm>
           <a:prstGeom prst="line">
             <a:avLst/>
           </a:prstGeom>
-          <a:ln w="25400">
+          <a:ln w="12700">
             <a:solidFill>
-              <a:srgbClr val="8EDBD4"/>
+              <a:srgbClr val="B4C7D2"/>
             </a:solidFill>
-            <a:headEnd type="none" w="med" len="med"/>
-            <a:tailEnd type="triangle" w="med" len="med"/>
           </a:ln>
           <a:effectLst/>
         </p:spPr>
       </p:cxnSp>
-      <p:sp>
-        <p:nvSpPr>
-          <p:cNvPr id="6" name="C4-E03 text 4" descr="sci-ppt:o004"/>
+      <p:cxnSp>
+        <p:nvCxnSpPr>
+          <p:cNvPr id="18" name="C4-E03 line 16" descr="sci-ppt:o016"/>
+          <p:cNvCxnSpPr/>
+          <p:nvPr/>
+        </p:nvCxnSpPr>
+        <p:spPr>
+          <a:xfrm>
+            <a:off x="6583680" y="1371600"/>
+            <a:ext cx="0" cy="3291840"/>
+          </a:xfrm>
+          <a:prstGeom prst="line">
+            <a:avLst/>
+          </a:prstGeom>
+          <a:ln w="7620">
+            <a:solidFill>
+              <a:srgbClr val="2E4756"/>
+            </a:solidFill>
+          </a:ln>
+          <a:effectLst/>
+        </p:spPr>
+      </p:cxnSp>
+      <p:sp>
+        <p:nvSpPr>
+          <p:cNvPr id="19" name="C4-E03 text 17" descr="sci-ppt:o017"/>
           <p:cNvSpPr txBox="1"/>
           <p:nvPr/>
         </p:nvSpPr>
         <p:spPr>
           <a:xfrm>
-            <a:off x="9464040" y="914400"/>
-            <a:ext cx="914400" cy="365760"/>
+            <a:off x="6126480" y="4745736"/>
+            <a:ext cx="914400" cy="208407"/>
           </a:xfrm>
           <a:prstGeom prst="rect">
             <a:avLst/>
@@ -3232,7 +3635,361 @@
           <a:effectLst/>
         </p:spPr>
         <p:txBody>
-          <a:bodyPr wrap="square" lIns="27432" rIns="27432" tIns="18288" bIns="18288" anchor="ctr">
+          <a:bodyPr wrap="none" lIns="18288" rIns="18288" tIns="18288" bIns="18288" anchor="t">
+            <a:spAutoFit/>
+          </a:bodyPr>
+          <a:lstStyle/>
+          <a:p>
+            <a:pPr algn="ctr">
+              <a:spcAft>
+                <a:spcPts val="0"/>
+              </a:spcAft>
+            </a:pPr>
+            <a:r>
+              <a:rPr sz="1050" b="0" i="0">
+                <a:solidFill>
+                  <a:srgbClr val="B4C7D2"/>
+                </a:solidFill>
+                <a:latin typeface="Arial"/>
+              </a:rPr>
+              <a:t>0</a:t>
+            </a:r>
+          </a:p>
+        </p:txBody>
+      </p:sp>
+      <p:cxnSp>
+        <p:nvCxnSpPr>
+          <p:cNvPr id="20" name="C4-E03 line 18" descr="sci-ppt:o018"/>
+          <p:cNvCxnSpPr/>
+          <p:nvPr/>
+        </p:nvCxnSpPr>
+        <p:spPr>
+          <a:xfrm>
+            <a:off x="8961120" y="4663440"/>
+            <a:ext cx="0" cy="64008"/>
+          </a:xfrm>
+          <a:prstGeom prst="line">
+            <a:avLst/>
+          </a:prstGeom>
+          <a:ln w="12700">
+            <a:solidFill>
+              <a:srgbClr val="B4C7D2"/>
+            </a:solidFill>
+          </a:ln>
+          <a:effectLst/>
+        </p:spPr>
+      </p:cxnSp>
+      <p:cxnSp>
+        <p:nvCxnSpPr>
+          <p:cNvPr id="21" name="C4-E03 line 19" descr="sci-ppt:o019"/>
+          <p:cNvCxnSpPr/>
+          <p:nvPr/>
+        </p:nvCxnSpPr>
+        <p:spPr>
+          <a:xfrm>
+            <a:off x="8961120" y="1371600"/>
+            <a:ext cx="0" cy="3291840"/>
+          </a:xfrm>
+          <a:prstGeom prst="line">
+            <a:avLst/>
+          </a:prstGeom>
+          <a:ln w="7620">
+            <a:solidFill>
+              <a:srgbClr val="2E4756"/>
+            </a:solidFill>
+          </a:ln>
+          <a:effectLst/>
+        </p:spPr>
+      </p:cxnSp>
+      <p:sp>
+        <p:nvSpPr>
+          <p:cNvPr id="22" name="C4-E03 text 20" descr="sci-ppt:o020"/>
+          <p:cNvSpPr txBox="1"/>
+          <p:nvPr/>
+        </p:nvSpPr>
+        <p:spPr>
+          <a:xfrm>
+            <a:off x="8503920" y="4745736"/>
+            <a:ext cx="914400" cy="208407"/>
+          </a:xfrm>
+          <a:prstGeom prst="rect">
+            <a:avLst/>
+          </a:prstGeom>
+          <a:noFill/>
+          <a:effectLst/>
+        </p:spPr>
+        <p:txBody>
+          <a:bodyPr wrap="none" lIns="18288" rIns="18288" tIns="18288" bIns="18288" anchor="t">
+            <a:spAutoFit/>
+          </a:bodyPr>
+          <a:lstStyle/>
+          <a:p>
+            <a:pPr algn="ctr">
+              <a:spcAft>
+                <a:spcPts val="0"/>
+              </a:spcAft>
+            </a:pPr>
+            <a:r>
+              <a:rPr sz="1050" b="0" i="0">
+                <a:solidFill>
+                  <a:srgbClr val="B4C7D2"/>
+                </a:solidFill>
+                <a:latin typeface="Arial"/>
+              </a:rPr>
+              <a:t>1</a:t>
+            </a:r>
+          </a:p>
+        </p:txBody>
+      </p:sp>
+      <p:cxnSp>
+        <p:nvCxnSpPr>
+          <p:cNvPr id="23" name="C4-E03 line 21" descr="sci-ppt:o021"/>
+          <p:cNvCxnSpPr/>
+          <p:nvPr/>
+        </p:nvCxnSpPr>
+        <p:spPr>
+          <a:xfrm>
+            <a:off x="6519672" y="4663440"/>
+            <a:ext cx="64008" cy="0"/>
+          </a:xfrm>
+          <a:prstGeom prst="line">
+            <a:avLst/>
+          </a:prstGeom>
+          <a:ln w="12700">
+            <a:solidFill>
+              <a:srgbClr val="B4C7D2"/>
+            </a:solidFill>
+          </a:ln>
+          <a:effectLst/>
+        </p:spPr>
+      </p:cxnSp>
+      <p:cxnSp>
+        <p:nvCxnSpPr>
+          <p:cNvPr id="24" name="C4-E03 line 22" descr="sci-ppt:o022"/>
+          <p:cNvCxnSpPr/>
+          <p:nvPr/>
+        </p:nvCxnSpPr>
+        <p:spPr>
+          <a:xfrm>
+            <a:off x="6519672" y="3017520"/>
+            <a:ext cx="64008" cy="0"/>
+          </a:xfrm>
+          <a:prstGeom prst="line">
+            <a:avLst/>
+          </a:prstGeom>
+          <a:ln w="12700">
+            <a:solidFill>
+              <a:srgbClr val="B4C7D2"/>
+            </a:solidFill>
+          </a:ln>
+          <a:effectLst/>
+        </p:spPr>
+      </p:cxnSp>
+      <p:cxnSp>
+        <p:nvCxnSpPr>
+          <p:cNvPr id="25" name="C4-E03 line 23" descr="sci-ppt:o023"/>
+          <p:cNvCxnSpPr/>
+          <p:nvPr/>
+        </p:nvCxnSpPr>
+        <p:spPr>
+          <a:xfrm>
+            <a:off x="6583680" y="3017520"/>
+            <a:ext cx="2377440" cy="0"/>
+          </a:xfrm>
+          <a:prstGeom prst="line">
+            <a:avLst/>
+          </a:prstGeom>
+          <a:ln w="7620">
+            <a:solidFill>
+              <a:srgbClr val="2E4756"/>
+            </a:solidFill>
+          </a:ln>
+          <a:effectLst/>
+        </p:spPr>
+      </p:cxnSp>
+      <p:sp>
+        <p:nvSpPr>
+          <p:cNvPr id="26" name="C4-E03 text 24" descr="sci-ppt:o024"/>
+          <p:cNvSpPr txBox="1"/>
+          <p:nvPr/>
+        </p:nvSpPr>
+        <p:spPr>
+          <a:xfrm>
+            <a:off x="5715000" y="2935224"/>
+            <a:ext cx="777240" cy="208407"/>
+          </a:xfrm>
+          <a:prstGeom prst="rect">
+            <a:avLst/>
+          </a:prstGeom>
+          <a:noFill/>
+          <a:effectLst/>
+        </p:spPr>
+        <p:txBody>
+          <a:bodyPr wrap="none" lIns="18288" rIns="18288" tIns="18288" bIns="18288" anchor="t">
+            <a:spAutoFit/>
+          </a:bodyPr>
+          <a:lstStyle/>
+          <a:p>
+            <a:pPr algn="r">
+              <a:spcAft>
+                <a:spcPts val="0"/>
+              </a:spcAft>
+            </a:pPr>
+            <a:r>
+              <a:rPr sz="1050" b="0" i="0">
+                <a:solidFill>
+                  <a:srgbClr val="B4C7D2"/>
+                </a:solidFill>
+                <a:latin typeface="Arial"/>
+              </a:rPr>
+              <a:t>0</a:t>
+            </a:r>
+          </a:p>
+        </p:txBody>
+      </p:sp>
+      <p:cxnSp>
+        <p:nvCxnSpPr>
+          <p:cNvPr id="27" name="C4-E03 line 25" descr="sci-ppt:o025"/>
+          <p:cNvCxnSpPr/>
+          <p:nvPr/>
+        </p:nvCxnSpPr>
+        <p:spPr>
+          <a:xfrm>
+            <a:off x="6519672" y="1371599"/>
+            <a:ext cx="64008" cy="0"/>
+          </a:xfrm>
+          <a:prstGeom prst="line">
+            <a:avLst/>
+          </a:prstGeom>
+          <a:ln w="12700">
+            <a:solidFill>
+              <a:srgbClr val="B4C7D2"/>
+            </a:solidFill>
+          </a:ln>
+          <a:effectLst/>
+        </p:spPr>
+      </p:cxnSp>
+      <p:cxnSp>
+        <p:nvCxnSpPr>
+          <p:cNvPr id="28" name="C4-E03 line 26" descr="sci-ppt:o026"/>
+          <p:cNvCxnSpPr/>
+          <p:nvPr/>
+        </p:nvCxnSpPr>
+        <p:spPr>
+          <a:xfrm>
+            <a:off x="6583680" y="1371599"/>
+            <a:ext cx="2377440" cy="0"/>
+          </a:xfrm>
+          <a:prstGeom prst="line">
+            <a:avLst/>
+          </a:prstGeom>
+          <a:ln w="7620">
+            <a:solidFill>
+              <a:srgbClr val="2E4756"/>
+            </a:solidFill>
+          </a:ln>
+          <a:effectLst/>
+        </p:spPr>
+      </p:cxnSp>
+      <p:sp>
+        <p:nvSpPr>
+          <p:cNvPr id="29" name="C4-E03 text 27" descr="sci-ppt:o027"/>
+          <p:cNvSpPr txBox="1"/>
+          <p:nvPr/>
+        </p:nvSpPr>
+        <p:spPr>
+          <a:xfrm>
+            <a:off x="5715000" y="1289303"/>
+            <a:ext cx="777240" cy="208407"/>
+          </a:xfrm>
+          <a:prstGeom prst="rect">
+            <a:avLst/>
+          </a:prstGeom>
+          <a:noFill/>
+          <a:effectLst/>
+        </p:spPr>
+        <p:txBody>
+          <a:bodyPr wrap="none" lIns="18288" rIns="18288" tIns="18288" bIns="18288" anchor="t">
+            <a:spAutoFit/>
+          </a:bodyPr>
+          <a:lstStyle/>
+          <a:p>
+            <a:pPr algn="r">
+              <a:spcAft>
+                <a:spcPts val="0"/>
+              </a:spcAft>
+            </a:pPr>
+            <a:r>
+              <a:rPr sz="1050" b="0" i="0">
+                <a:solidFill>
+                  <a:srgbClr val="B4C7D2"/>
+                </a:solidFill>
+                <a:latin typeface="Arial"/>
+              </a:rPr>
+              <a:t>0.5</a:t>
+            </a:r>
+          </a:p>
+        </p:txBody>
+      </p:sp>
+      <p:sp>
+        <p:nvSpPr>
+          <p:cNvPr id="30" name="C4-E03 text 28" descr="sci-ppt:o028"/>
+          <p:cNvSpPr txBox="1"/>
+          <p:nvPr/>
+        </p:nvSpPr>
+        <p:spPr>
+          <a:xfrm>
+            <a:off x="6583680" y="4946903"/>
+            <a:ext cx="2377440" cy="231648"/>
+          </a:xfrm>
+          <a:prstGeom prst="rect">
+            <a:avLst/>
+          </a:prstGeom>
+          <a:noFill/>
+          <a:effectLst/>
+        </p:spPr>
+        <p:txBody>
+          <a:bodyPr wrap="none" lIns="18288" rIns="18288" tIns="18288" bIns="18288" anchor="t">
+            <a:spAutoFit/>
+          </a:bodyPr>
+          <a:lstStyle/>
+          <a:p>
+            <a:pPr algn="ctr">
+              <a:spcAft>
+                <a:spcPts val="0"/>
+              </a:spcAft>
+            </a:pPr>
+            <a:r>
+              <a:rPr sz="1200" b="0" i="0">
+                <a:solidFill>
+                  <a:srgbClr val="E7F0F3"/>
+                </a:solidFill>
+                <a:latin typeface="Arial"/>
+              </a:rPr>
+              <a:t>weight</a:t>
+            </a:r>
+          </a:p>
+        </p:txBody>
+      </p:sp>
+      <p:sp>
+        <p:nvSpPr>
+          <p:cNvPr id="31" name="C4-E03 text 29" descr="sci-ppt:o029"/>
+          <p:cNvSpPr txBox="1"/>
+          <p:nvPr/>
+        </p:nvSpPr>
+        <p:spPr>
+          <a:xfrm>
+            <a:off x="6035040" y="1024128"/>
+            <a:ext cx="2743200" cy="231648"/>
+          </a:xfrm>
+          <a:prstGeom prst="rect">
+            <a:avLst/>
+          </a:prstGeom>
+          <a:noFill/>
+          <a:effectLst/>
+        </p:spPr>
+        <p:txBody>
+          <a:bodyPr wrap="none" lIns="18288" rIns="18288" tIns="18288" bIns="18288" anchor="t">
             <a:spAutoFit/>
           </a:bodyPr>
           <a:lstStyle/>
@@ -3243,49 +4000,63 @@
               </a:spcAft>
             </a:pPr>
             <a:r>
-              <a:rPr sz="1800" b="0" i="0">
+              <a:rPr sz="1200" b="0" i="0">
                 <a:solidFill>
                   <a:srgbClr val="E7F0F3"/>
                 </a:solidFill>
                 <a:latin typeface="Arial"/>
               </a:rPr>
-              <a:t>+z</a:t>
-            </a:r>
-          </a:p>
-        </p:txBody>
-      </p:sp>
-      <p:cxnSp>
-        <p:nvCxnSpPr>
-          <p:cNvPr id="7" name="C4-E03 line 5" descr="sci-ppt:o005"/>
-          <p:cNvCxnSpPr/>
+              <a:t>z / h_f</a:t>
+            </a:r>
+          </a:p>
+        </p:txBody>
+      </p:sp>
+      <p:sp>
+        <p:nvSpPr>
+          <p:cNvPr id="32" name="C4-E03 rect 30" descr="sci-ppt:o030"/>
+          <p:cNvSpPr/>
           <p:nvPr/>
-        </p:nvCxnSpPr>
-        <p:spPr>
-          <a:xfrm>
-            <a:off x="822960" y="1371600"/>
-            <a:ext cx="0" cy="1143000"/>
-          </a:xfrm>
-          <a:prstGeom prst="line">
-            <a:avLst/>
-          </a:prstGeom>
-          <a:ln w="25400">
+        </p:nvSpPr>
+        <p:spPr>
+          <a:xfrm>
+            <a:off x="6583680" y="1371599"/>
+            <a:ext cx="2377440" cy="3291840"/>
+          </a:xfrm>
+          <a:prstGeom prst="rect">
+            <a:avLst/>
+          </a:prstGeom>
+          <a:solidFill>
+            <a:srgbClr val="8EDBD4">
+              <a:alpha val="30000"/>
+            </a:srgbClr>
+          </a:solidFill>
+          <a:ln w="12700">
             <a:solidFill>
-              <a:srgbClr val="8EDBD4"/>
+              <a:srgbClr val="8EDBD4">
+                <a:alpha val="30000"/>
+              </a:srgbClr>
             </a:solidFill>
           </a:ln>
           <a:effectLst/>
         </p:spPr>
-      </p:cxnSp>
-      <p:sp>
-        <p:nvSpPr>
-          <p:cNvPr id="8" name="C4-E03 text 6" descr="sci-ppt:o006"/>
+        <p:txBody>
+          <a:bodyPr rtlCol="0" anchor="ctr"/>
+          <a:lstStyle/>
+          <a:p>
+            <a:pPr algn="ctr"/>
+          </a:p>
+        </p:txBody>
+      </p:sp>
+      <p:sp>
+        <p:nvSpPr>
+          <p:cNvPr id="33" name="C4-E03 text 31" descr="sci-ppt:o031"/>
           <p:cNvSpPr txBox="1"/>
           <p:nvPr/>
         </p:nvSpPr>
         <p:spPr>
           <a:xfrm>
-            <a:off x="274320" y="2651760"/>
-            <a:ext cx="1828800" cy="365760"/>
+            <a:off x="6775704" y="1609343"/>
+            <a:ext cx="1280160" cy="223900"/>
           </a:xfrm>
           <a:prstGeom prst="rect">
             <a:avLst/>
@@ -3294,349 +4065,7 @@
           <a:effectLst/>
         </p:spPr>
         <p:txBody>
-          <a:bodyPr wrap="square" lIns="27432" rIns="27432" tIns="18288" bIns="18288" anchor="ctr">
-            <a:spAutoFit/>
-          </a:bodyPr>
-          <a:lstStyle/>
-          <a:p>
-            <a:pPr algn="l">
-              <a:spcAft>
-                <a:spcPts val="0"/>
-              </a:spcAft>
-            </a:pPr>
-            <a:r>
-              <a:rPr sz="1800" b="0" i="0">
-                <a:solidFill>
-                  <a:srgbClr val="E7F0F3"/>
-                </a:solidFill>
-                <a:latin typeface="Arial"/>
-              </a:rPr>
-              <a:t>h_f</a:t>
-            </a:r>
-          </a:p>
-        </p:txBody>
-      </p:sp>
-      <p:sp>
-        <p:nvSpPr>
-          <p:cNvPr id="9" name="C4-E03 text 7" descr="sci-ppt:o007"/>
-          <p:cNvSpPr txBox="1"/>
-          <p:nvPr/>
-        </p:nvSpPr>
-        <p:spPr>
-          <a:xfrm>
-            <a:off x="2743200" y="1965960"/>
-            <a:ext cx="4572000" cy="365760"/>
-          </a:xfrm>
-          <a:prstGeom prst="rect">
-            <a:avLst/>
-          </a:prstGeom>
-          <a:noFill/>
-          <a:effectLst/>
-        </p:spPr>
-        <p:txBody>
-          <a:bodyPr wrap="square" lIns="27432" rIns="27432" tIns="18288" bIns="18288" anchor="ctr">
-            <a:spAutoFit/>
-          </a:bodyPr>
-          <a:lstStyle/>
-          <a:p>
-            <a:pPr algn="l">
-              <a:spcAft>
-                <a:spcPts val="0"/>
-              </a:spcAft>
-            </a:pPr>
-            <a:r>
-              <a:rPr sz="1800" b="0" i="0">
-                <a:solidFill>
-                  <a:srgbClr val="E7F0F3"/>
-                </a:solidFill>
-                <a:latin typeface="Arial"/>
-              </a:rPr>
-              <a:t>z = 0: neutral midplane</a:t>
-            </a:r>
-          </a:p>
-        </p:txBody>
-      </p:sp>
-      <p:sp>
-        <p:nvSpPr>
-          <p:cNvPr id="10" name="C4-E03 text 8" descr="sci-ppt:o008"/>
-          <p:cNvSpPr txBox="1"/>
-          <p:nvPr/>
-        </p:nvSpPr>
-        <p:spPr>
-          <a:xfrm>
-            <a:off x="1188720" y="3108960"/>
-            <a:ext cx="10058400" cy="457200"/>
-          </a:xfrm>
-          <a:prstGeom prst="rect">
-            <a:avLst/>
-          </a:prstGeom>
-          <a:noFill/>
-          <a:effectLst/>
-        </p:spPr>
-        <p:txBody>
-          <a:bodyPr wrap="square" lIns="27432" rIns="27432" tIns="18288" bIns="18288" anchor="ctr">
-            <a:spAutoFit/>
-          </a:bodyPr>
-          <a:lstStyle/>
-          <a:p>
-            <a:pPr algn="l">
-              <a:spcAft>
-                <a:spcPts val="0"/>
-              </a:spcAft>
-            </a:pPr>
-            <a:r>
-              <a:rPr sz="1900" b="0" i="0">
-                <a:solidFill>
-                  <a:srgbClr val="8EDBD4"/>
-                </a:solidFill>
-                <a:latin typeface="Arial"/>
-              </a:rPr>
-              <a:t>m_A = ρ_f h_f; bending weights each layer by z².</a:t>
-            </a:r>
-          </a:p>
-        </p:txBody>
-      </p:sp>
-      <p:cxnSp>
-        <p:nvCxnSpPr>
-          <p:cNvPr id="11" name="C4-E03 line 9" descr="sci-ppt:o009"/>
-          <p:cNvCxnSpPr/>
-          <p:nvPr/>
-        </p:nvCxnSpPr>
-        <p:spPr>
-          <a:xfrm>
-            <a:off x="274320" y="3977639"/>
-            <a:ext cx="11612880" cy="0"/>
-          </a:xfrm>
-          <a:prstGeom prst="line">
-            <a:avLst/>
-          </a:prstGeom>
-          <a:ln w="12700">
-            <a:solidFill>
-              <a:srgbClr val="405967"/>
-            </a:solidFill>
-          </a:ln>
-          <a:effectLst/>
-        </p:spPr>
-      </p:cxnSp>
-      <p:sp>
-        <p:nvSpPr>
-          <p:cNvPr id="12" name="C4-E03 text 10" descr="sci-ppt:o010"/>
-          <p:cNvSpPr txBox="1"/>
-          <p:nvPr/>
-        </p:nvSpPr>
-        <p:spPr>
-          <a:xfrm>
-            <a:off x="320040" y="4096512"/>
-            <a:ext cx="5715000" cy="246888"/>
-          </a:xfrm>
-          <a:prstGeom prst="rect">
-            <a:avLst/>
-          </a:prstGeom>
-          <a:noFill/>
-          <a:effectLst/>
-        </p:spPr>
-        <p:txBody>
-          <a:bodyPr wrap="square" lIns="27432" rIns="27432" tIns="18288" bIns="18288" anchor="ctr">
-            <a:spAutoFit/>
-          </a:bodyPr>
-          <a:lstStyle/>
-          <a:p>
-            <a:pPr algn="l">
-              <a:spcAft>
-                <a:spcPts val="0"/>
-              </a:spcAft>
-            </a:pPr>
-            <a:r>
-              <a:rPr sz="1150" b="0" i="0">
-                <a:solidFill>
-                  <a:srgbClr val="B4C7D2"/>
-                </a:solidFill>
-                <a:latin typeface="Arial"/>
-              </a:rPr>
-              <a:t>• h_f — thickness</a:t>
-            </a:r>
-          </a:p>
-        </p:txBody>
-      </p:sp>
-      <p:sp>
-        <p:nvSpPr>
-          <p:cNvPr id="13" name="C4-E03 text 11" descr="sci-ppt:o011"/>
-          <p:cNvSpPr txBox="1"/>
-          <p:nvPr/>
-        </p:nvSpPr>
-        <p:spPr>
-          <a:xfrm>
-            <a:off x="6217920" y="4096512"/>
-            <a:ext cx="5715000" cy="246888"/>
-          </a:xfrm>
-          <a:prstGeom prst="rect">
-            <a:avLst/>
-          </a:prstGeom>
-          <a:noFill/>
-          <a:effectLst/>
-        </p:spPr>
-        <p:txBody>
-          <a:bodyPr wrap="square" lIns="27432" rIns="27432" tIns="18288" bIns="18288" anchor="ctr">
-            <a:spAutoFit/>
-          </a:bodyPr>
-          <a:lstStyle/>
-          <a:p>
-            <a:pPr algn="l">
-              <a:spcAft>
-                <a:spcPts val="0"/>
-              </a:spcAft>
-            </a:pPr>
-            <a:r>
-              <a:rPr sz="1150" b="0" i="0">
-                <a:solidFill>
-                  <a:srgbClr val="B4C7D2"/>
-                </a:solidFill>
-                <a:latin typeface="Arial"/>
-              </a:rPr>
-              <a:t>• z = 0 — neutral midplane</a:t>
-            </a:r>
-          </a:p>
-        </p:txBody>
-      </p:sp>
-      <p:sp>
-        <p:nvSpPr>
-          <p:cNvPr id="14" name="C4-E03 text 12" descr="sci-ppt:o012"/>
-          <p:cNvSpPr txBox="1"/>
-          <p:nvPr/>
-        </p:nvSpPr>
-        <p:spPr>
-          <a:xfrm>
-            <a:off x="320040" y="4329684"/>
-            <a:ext cx="5715000" cy="246888"/>
-          </a:xfrm>
-          <a:prstGeom prst="rect">
-            <a:avLst/>
-          </a:prstGeom>
-          <a:noFill/>
-          <a:effectLst/>
-        </p:spPr>
-        <p:txBody>
-          <a:bodyPr wrap="square" lIns="27432" rIns="27432" tIns="18288" bIns="18288" anchor="ctr">
-            <a:spAutoFit/>
-          </a:bodyPr>
-          <a:lstStyle/>
-          <a:p>
-            <a:pPr algn="l">
-              <a:spcAft>
-                <a:spcPts val="0"/>
-              </a:spcAft>
-            </a:pPr>
-            <a:r>
-              <a:rPr sz="1150" b="0" i="0">
-                <a:solidFill>
-                  <a:srgbClr val="B4C7D2"/>
-                </a:solidFill>
-                <a:latin typeface="Arial"/>
-              </a:rPr>
-              <a:t>• ρ_f → m_A</a:t>
-            </a:r>
-          </a:p>
-        </p:txBody>
-      </p:sp>
-      <p:sp>
-        <p:nvSpPr>
-          <p:cNvPr id="15" name="C4-E03 text 13" descr="sci-ppt:o013"/>
-          <p:cNvSpPr txBox="1"/>
-          <p:nvPr/>
-        </p:nvSpPr>
-        <p:spPr>
-          <a:xfrm>
-            <a:off x="6217920" y="4329684"/>
-            <a:ext cx="5715000" cy="246888"/>
-          </a:xfrm>
-          <a:prstGeom prst="rect">
-            <a:avLst/>
-          </a:prstGeom>
-          <a:noFill/>
-          <a:effectLst/>
-        </p:spPr>
-        <p:txBody>
-          <a:bodyPr wrap="square" lIns="27432" rIns="27432" tIns="18288" bIns="18288" anchor="ctr">
-            <a:spAutoFit/>
-          </a:bodyPr>
-          <a:lstStyle/>
-          <a:p>
-            <a:pPr algn="l">
-              <a:spcAft>
-                <a:spcPts val="0"/>
-              </a:spcAft>
-            </a:pPr>
-            <a:r>
-              <a:rPr sz="1150" b="0" i="0">
-                <a:solidFill>
-                  <a:srgbClr val="B4C7D2"/>
-                </a:solidFill>
-                <a:latin typeface="Arial"/>
-              </a:rPr>
-              <a:t>• E_f, ν_f → D_f</a:t>
-            </a:r>
-          </a:p>
-        </p:txBody>
-      </p:sp>
-      <p:sp>
-        <p:nvSpPr>
-          <p:cNvPr id="16" name="C4-E03 text 14" descr="sci-ppt:o014"/>
-          <p:cNvSpPr txBox="1"/>
-          <p:nvPr/>
-        </p:nvSpPr>
-        <p:spPr>
-          <a:xfrm>
-            <a:off x="320040" y="4562856"/>
-            <a:ext cx="5715000" cy="246888"/>
-          </a:xfrm>
-          <a:prstGeom prst="rect">
-            <a:avLst/>
-          </a:prstGeom>
-          <a:noFill/>
-          <a:effectLst/>
-        </p:spPr>
-        <p:txBody>
-          <a:bodyPr wrap="square" lIns="27432" rIns="27432" tIns="18288" bIns="18288" anchor="ctr">
-            <a:spAutoFit/>
-          </a:bodyPr>
-          <a:lstStyle/>
-          <a:p>
-            <a:pPr algn="l">
-              <a:spcAft>
-                <a:spcPts val="0"/>
-              </a:spcAft>
-            </a:pPr>
-            <a:r>
-              <a:rPr sz="1150" b="0" i="0">
-                <a:solidFill>
-                  <a:srgbClr val="B4C7D2"/>
-                </a:solidFill>
-                <a:latin typeface="Arial"/>
-              </a:rPr>
-              <a:t>• z² dz — bending moment weight</a:t>
-            </a:r>
-          </a:p>
-        </p:txBody>
-      </p:sp>
-      <p:sp>
-        <p:nvSpPr>
-          <p:cNvPr id="17" name="C4-E03 text 15" descr="sci-ppt:o015"/>
-          <p:cNvSpPr txBox="1"/>
-          <p:nvPr/>
-        </p:nvSpPr>
-        <p:spPr>
-          <a:xfrm>
-            <a:off x="320040" y="5596128"/>
-            <a:ext cx="11430000" cy="292608"/>
-          </a:xfrm>
-          <a:prstGeom prst="rect">
-            <a:avLst/>
-          </a:prstGeom>
-          <a:noFill/>
-          <a:effectLst/>
-        </p:spPr>
-        <p:txBody>
-          <a:bodyPr wrap="square" lIns="27432" rIns="27432" tIns="18288" bIns="18288" anchor="ctr">
+          <a:bodyPr wrap="none" lIns="18288" rIns="18288" tIns="18288" bIns="18288" anchor="t">
             <a:spAutoFit/>
           </a:bodyPr>
           <a:lstStyle/>
@@ -3653,21 +4082,109 @@
                 </a:solidFill>
                 <a:latin typeface="Arial"/>
               </a:rPr>
-              <a:t>Density integrates once; bending weights distance squared.</a:t>
-            </a:r>
-          </a:p>
-        </p:txBody>
-      </p:sp>
-      <p:sp>
-        <p:nvSpPr>
-          <p:cNvPr id="18" name="C4-E03 text 16" descr="sci-ppt:o016"/>
+              <a:t>inertia: 1</a:t>
+            </a:r>
+          </a:p>
+        </p:txBody>
+      </p:sp>
+      <p:cxnSp>
+        <p:nvCxnSpPr>
+          <p:cNvPr id="34" name="C4-E03 line 32" descr="sci-ppt:o032"/>
+          <p:cNvCxnSpPr/>
+          <p:nvPr/>
+        </p:nvCxnSpPr>
+        <p:spPr>
+          <a:xfrm>
+            <a:off x="9601200" y="4663440"/>
+            <a:ext cx="2194560" cy="0"/>
+          </a:xfrm>
+          <a:prstGeom prst="line">
+            <a:avLst/>
+          </a:prstGeom>
+          <a:ln w="19050">
+            <a:solidFill>
+              <a:srgbClr val="B4C7D2"/>
+            </a:solidFill>
+          </a:ln>
+          <a:effectLst/>
+        </p:spPr>
+      </p:cxnSp>
+      <p:cxnSp>
+        <p:nvCxnSpPr>
+          <p:cNvPr id="35" name="C4-E03 line 33" descr="sci-ppt:o033"/>
+          <p:cNvCxnSpPr/>
+          <p:nvPr/>
+        </p:nvCxnSpPr>
+        <p:spPr>
+          <a:xfrm>
+            <a:off x="9601200" y="1371600"/>
+            <a:ext cx="0" cy="3291840"/>
+          </a:xfrm>
+          <a:prstGeom prst="line">
+            <a:avLst/>
+          </a:prstGeom>
+          <a:ln w="19050">
+            <a:solidFill>
+              <a:srgbClr val="B4C7D2"/>
+            </a:solidFill>
+          </a:ln>
+          <a:effectLst/>
+        </p:spPr>
+      </p:cxnSp>
+      <p:cxnSp>
+        <p:nvCxnSpPr>
+          <p:cNvPr id="36" name="C4-E03 line 34" descr="sci-ppt:o034"/>
+          <p:cNvCxnSpPr/>
+          <p:nvPr/>
+        </p:nvCxnSpPr>
+        <p:spPr>
+          <a:xfrm>
+            <a:off x="9601200" y="4663440"/>
+            <a:ext cx="0" cy="64008"/>
+          </a:xfrm>
+          <a:prstGeom prst="line">
+            <a:avLst/>
+          </a:prstGeom>
+          <a:ln w="12700">
+            <a:solidFill>
+              <a:srgbClr val="B4C7D2"/>
+            </a:solidFill>
+          </a:ln>
+          <a:effectLst/>
+        </p:spPr>
+      </p:cxnSp>
+      <p:cxnSp>
+        <p:nvCxnSpPr>
+          <p:cNvPr id="37" name="C4-E03 line 35" descr="sci-ppt:o035"/>
+          <p:cNvCxnSpPr/>
+          <p:nvPr/>
+        </p:nvCxnSpPr>
+        <p:spPr>
+          <a:xfrm>
+            <a:off x="9601200" y="1371600"/>
+            <a:ext cx="0" cy="3291840"/>
+          </a:xfrm>
+          <a:prstGeom prst="line">
+            <a:avLst/>
+          </a:prstGeom>
+          <a:ln w="7620">
+            <a:solidFill>
+              <a:srgbClr val="2E4756"/>
+            </a:solidFill>
+          </a:ln>
+          <a:effectLst/>
+        </p:spPr>
+      </p:cxnSp>
+      <p:sp>
+        <p:nvSpPr>
+          <p:cNvPr id="38" name="C4-E03 text 36" descr="sci-ppt:o036"/>
           <p:cNvSpPr txBox="1"/>
           <p:nvPr/>
         </p:nvSpPr>
         <p:spPr>
           <a:xfrm>
-            <a:off x="320040" y="6473952"/>
-            <a:ext cx="11430000" cy="256032"/>
+            <a:off x="9144000" y="4745736"/>
+            <a:ext cx="914400" cy="208407"/>
           </a:xfrm>
           <a:prstGeom prst="rect">
             <a:avLst/>
@@ -3676,7 +4193,851 @@
           <a:effectLst/>
         </p:spPr>
         <p:txBody>
-          <a:bodyPr wrap="square" lIns="27432" rIns="27432" tIns="18288" bIns="18288" anchor="ctr">
+          <a:bodyPr wrap="none" lIns="18288" rIns="18288" tIns="18288" bIns="18288" anchor="t">
+            <a:spAutoFit/>
+          </a:bodyPr>
+          <a:lstStyle/>
+          <a:p>
+            <a:pPr algn="ctr">
+              <a:spcAft>
+                <a:spcPts val="0"/>
+              </a:spcAft>
+            </a:pPr>
+            <a:r>
+              <a:rPr sz="1050" b="0" i="0">
+                <a:solidFill>
+                  <a:srgbClr val="B4C7D2"/>
+                </a:solidFill>
+                <a:latin typeface="Arial"/>
+              </a:rPr>
+              <a:t>0</a:t>
+            </a:r>
+          </a:p>
+        </p:txBody>
+      </p:sp>
+      <p:cxnSp>
+        <p:nvCxnSpPr>
+          <p:cNvPr id="39" name="C4-E03 line 37" descr="sci-ppt:o037"/>
+          <p:cNvCxnSpPr/>
+          <p:nvPr/>
+        </p:nvCxnSpPr>
+        <p:spPr>
+          <a:xfrm>
+            <a:off x="11430000" y="4663440"/>
+            <a:ext cx="0" cy="64008"/>
+          </a:xfrm>
+          <a:prstGeom prst="line">
+            <a:avLst/>
+          </a:prstGeom>
+          <a:ln w="12700">
+            <a:solidFill>
+              <a:srgbClr val="B4C7D2"/>
+            </a:solidFill>
+          </a:ln>
+          <a:effectLst/>
+        </p:spPr>
+      </p:cxnSp>
+      <p:cxnSp>
+        <p:nvCxnSpPr>
+          <p:cNvPr id="40" name="C4-E03 line 38" descr="sci-ppt:o038"/>
+          <p:cNvCxnSpPr/>
+          <p:nvPr/>
+        </p:nvCxnSpPr>
+        <p:spPr>
+          <a:xfrm>
+            <a:off x="11430000" y="1371600"/>
+            <a:ext cx="0" cy="3291840"/>
+          </a:xfrm>
+          <a:prstGeom prst="line">
+            <a:avLst/>
+          </a:prstGeom>
+          <a:ln w="7620">
+            <a:solidFill>
+              <a:srgbClr val="2E4756"/>
+            </a:solidFill>
+          </a:ln>
+          <a:effectLst/>
+        </p:spPr>
+      </p:cxnSp>
+      <p:sp>
+        <p:nvSpPr>
+          <p:cNvPr id="41" name="C4-E03 text 39" descr="sci-ppt:o039"/>
+          <p:cNvSpPr txBox="1"/>
+          <p:nvPr/>
+        </p:nvSpPr>
+        <p:spPr>
+          <a:xfrm>
+            <a:off x="10972800" y="4745736"/>
+            <a:ext cx="914400" cy="208407"/>
+          </a:xfrm>
+          <a:prstGeom prst="rect">
+            <a:avLst/>
+          </a:prstGeom>
+          <a:noFill/>
+          <a:effectLst/>
+        </p:spPr>
+        <p:txBody>
+          <a:bodyPr wrap="none" lIns="18288" rIns="18288" tIns="18288" bIns="18288" anchor="t">
+            <a:spAutoFit/>
+          </a:bodyPr>
+          <a:lstStyle/>
+          <a:p>
+            <a:pPr algn="ctr">
+              <a:spcAft>
+                <a:spcPts val="0"/>
+              </a:spcAft>
+            </a:pPr>
+            <a:r>
+              <a:rPr sz="1050" b="0" i="0">
+                <a:solidFill>
+                  <a:srgbClr val="B4C7D2"/>
+                </a:solidFill>
+                <a:latin typeface="Arial"/>
+              </a:rPr>
+              <a:t>0.25</a:t>
+            </a:r>
+          </a:p>
+        </p:txBody>
+      </p:sp>
+      <p:cxnSp>
+        <p:nvCxnSpPr>
+          <p:cNvPr id="42" name="C4-E03 line 40" descr="sci-ppt:o040"/>
+          <p:cNvCxnSpPr/>
+          <p:nvPr/>
+        </p:nvCxnSpPr>
+        <p:spPr>
+          <a:xfrm>
+            <a:off x="9537192" y="4663440"/>
+            <a:ext cx="64008" cy="0"/>
+          </a:xfrm>
+          <a:prstGeom prst="line">
+            <a:avLst/>
+          </a:prstGeom>
+          <a:ln w="12700">
+            <a:solidFill>
+              <a:srgbClr val="B4C7D2"/>
+            </a:solidFill>
+          </a:ln>
+          <a:effectLst/>
+        </p:spPr>
+      </p:cxnSp>
+      <p:cxnSp>
+        <p:nvCxnSpPr>
+          <p:cNvPr id="43" name="C4-E03 line 41" descr="sci-ppt:o041"/>
+          <p:cNvCxnSpPr/>
+          <p:nvPr/>
+        </p:nvCxnSpPr>
+        <p:spPr>
+          <a:xfrm>
+            <a:off x="9537192" y="3017520"/>
+            <a:ext cx="64008" cy="0"/>
+          </a:xfrm>
+          <a:prstGeom prst="line">
+            <a:avLst/>
+          </a:prstGeom>
+          <a:ln w="12700">
+            <a:solidFill>
+              <a:srgbClr val="B4C7D2"/>
+            </a:solidFill>
+          </a:ln>
+          <a:effectLst/>
+        </p:spPr>
+      </p:cxnSp>
+      <p:cxnSp>
+        <p:nvCxnSpPr>
+          <p:cNvPr id="44" name="C4-E03 line 42" descr="sci-ppt:o042"/>
+          <p:cNvCxnSpPr/>
+          <p:nvPr/>
+        </p:nvCxnSpPr>
+        <p:spPr>
+          <a:xfrm>
+            <a:off x="9601200" y="3017520"/>
+            <a:ext cx="2194560" cy="0"/>
+          </a:xfrm>
+          <a:prstGeom prst="line">
+            <a:avLst/>
+          </a:prstGeom>
+          <a:ln w="7620">
+            <a:solidFill>
+              <a:srgbClr val="2E4756"/>
+            </a:solidFill>
+          </a:ln>
+          <a:effectLst/>
+        </p:spPr>
+      </p:cxnSp>
+      <p:sp>
+        <p:nvSpPr>
+          <p:cNvPr id="45" name="C4-E03 text 43" descr="sci-ppt:o043"/>
+          <p:cNvSpPr txBox="1"/>
+          <p:nvPr/>
+        </p:nvSpPr>
+        <p:spPr>
+          <a:xfrm>
+            <a:off x="8732520" y="2935224"/>
+            <a:ext cx="777240" cy="208407"/>
+          </a:xfrm>
+          <a:prstGeom prst="rect">
+            <a:avLst/>
+          </a:prstGeom>
+          <a:noFill/>
+          <a:effectLst/>
+        </p:spPr>
+        <p:txBody>
+          <a:bodyPr wrap="none" lIns="18288" rIns="18288" tIns="18288" bIns="18288" anchor="t">
+            <a:spAutoFit/>
+          </a:bodyPr>
+          <a:lstStyle/>
+          <a:p>
+            <a:pPr algn="r">
+              <a:spcAft>
+                <a:spcPts val="0"/>
+              </a:spcAft>
+            </a:pPr>
+            <a:r>
+              <a:rPr sz="1050" b="0" i="0">
+                <a:solidFill>
+                  <a:srgbClr val="B4C7D2"/>
+                </a:solidFill>
+                <a:latin typeface="Arial"/>
+              </a:rPr>
+              <a:t>0</a:t>
+            </a:r>
+          </a:p>
+        </p:txBody>
+      </p:sp>
+      <p:cxnSp>
+        <p:nvCxnSpPr>
+          <p:cNvPr id="46" name="C4-E03 line 44" descr="sci-ppt:o044"/>
+          <p:cNvCxnSpPr/>
+          <p:nvPr/>
+        </p:nvCxnSpPr>
+        <p:spPr>
+          <a:xfrm>
+            <a:off x="9537192" y="1371599"/>
+            <a:ext cx="64008" cy="0"/>
+          </a:xfrm>
+          <a:prstGeom prst="line">
+            <a:avLst/>
+          </a:prstGeom>
+          <a:ln w="12700">
+            <a:solidFill>
+              <a:srgbClr val="B4C7D2"/>
+            </a:solidFill>
+          </a:ln>
+          <a:effectLst/>
+        </p:spPr>
+      </p:cxnSp>
+      <p:cxnSp>
+        <p:nvCxnSpPr>
+          <p:cNvPr id="47" name="C4-E03 line 45" descr="sci-ppt:o045"/>
+          <p:cNvCxnSpPr/>
+          <p:nvPr/>
+        </p:nvCxnSpPr>
+        <p:spPr>
+          <a:xfrm>
+            <a:off x="9601200" y="1371599"/>
+            <a:ext cx="2194560" cy="0"/>
+          </a:xfrm>
+          <a:prstGeom prst="line">
+            <a:avLst/>
+          </a:prstGeom>
+          <a:ln w="7620">
+            <a:solidFill>
+              <a:srgbClr val="2E4756"/>
+            </a:solidFill>
+          </a:ln>
+          <a:effectLst/>
+        </p:spPr>
+      </p:cxnSp>
+      <p:sp>
+        <p:nvSpPr>
+          <p:cNvPr id="48" name="C4-E03 text 46" descr="sci-ppt:o046"/>
+          <p:cNvSpPr txBox="1"/>
+          <p:nvPr/>
+        </p:nvSpPr>
+        <p:spPr>
+          <a:xfrm>
+            <a:off x="8732520" y="1289303"/>
+            <a:ext cx="777240" cy="208407"/>
+          </a:xfrm>
+          <a:prstGeom prst="rect">
+            <a:avLst/>
+          </a:prstGeom>
+          <a:noFill/>
+          <a:effectLst/>
+        </p:spPr>
+        <p:txBody>
+          <a:bodyPr wrap="none" lIns="18288" rIns="18288" tIns="18288" bIns="18288" anchor="t">
+            <a:spAutoFit/>
+          </a:bodyPr>
+          <a:lstStyle/>
+          <a:p>
+            <a:pPr algn="r">
+              <a:spcAft>
+                <a:spcPts val="0"/>
+              </a:spcAft>
+            </a:pPr>
+            <a:r>
+              <a:rPr sz="1050" b="0" i="0">
+                <a:solidFill>
+                  <a:srgbClr val="B4C7D2"/>
+                </a:solidFill>
+                <a:latin typeface="Arial"/>
+              </a:rPr>
+              <a:t>0.5</a:t>
+            </a:r>
+          </a:p>
+        </p:txBody>
+      </p:sp>
+      <p:sp>
+        <p:nvSpPr>
+          <p:cNvPr id="49" name="C4-E03 text 47" descr="sci-ppt:o047"/>
+          <p:cNvSpPr txBox="1"/>
+          <p:nvPr/>
+        </p:nvSpPr>
+        <p:spPr>
+          <a:xfrm>
+            <a:off x="9601200" y="4946903"/>
+            <a:ext cx="2194560" cy="231648"/>
+          </a:xfrm>
+          <a:prstGeom prst="rect">
+            <a:avLst/>
+          </a:prstGeom>
+          <a:noFill/>
+          <a:effectLst/>
+        </p:spPr>
+        <p:txBody>
+          <a:bodyPr wrap="none" lIns="18288" rIns="18288" tIns="18288" bIns="18288" anchor="t">
+            <a:spAutoFit/>
+          </a:bodyPr>
+          <a:lstStyle/>
+          <a:p>
+            <a:pPr algn="ctr">
+              <a:spcAft>
+                <a:spcPts val="0"/>
+              </a:spcAft>
+            </a:pPr>
+            <a:r>
+              <a:rPr sz="1200" b="0" i="0">
+                <a:solidFill>
+                  <a:srgbClr val="E7F0F3"/>
+                </a:solidFill>
+                <a:latin typeface="Arial"/>
+              </a:rPr>
+              <a:t>z²</a:t>
+            </a:r>
+          </a:p>
+        </p:txBody>
+      </p:sp>
+      <p:sp>
+        <p:nvSpPr>
+          <p:cNvPr id="50" name="C4-E03 polygon 48" descr="sci-ppt:o048"/>
+          <p:cNvSpPr/>
+          <p:nvPr/>
+        </p:nvSpPr>
+        <p:spPr>
+          <a:xfrm>
+            <a:off x="9601386" y="1371599"/>
+            <a:ext cx="1828614" cy="3291841"/>
+          </a:xfrm>
+          <a:custGeom>
+            <a:avLst/>
+            <a:gdLst/>
+            <a:ahLst/>
+            <a:cxnLst/>
+            <a:rect l="l" t="t" r="r" b="b"/>
+            <a:pathLst>
+              <a:path w="1828614" h="3291841">
+                <a:moveTo>
+                  <a:pt x="1828614" y="3291841"/>
+                </a:moveTo>
+                <a:lnTo>
+                  <a:pt x="1755469" y="3258590"/>
+                </a:lnTo>
+                <a:lnTo>
+                  <a:pt x="1683817" y="3225339"/>
+                </a:lnTo>
+                <a:lnTo>
+                  <a:pt x="1613658" y="3192088"/>
+                </a:lnTo>
+                <a:lnTo>
+                  <a:pt x="1544992" y="3158837"/>
+                </a:lnTo>
+                <a:lnTo>
+                  <a:pt x="1477818" y="3125586"/>
+                </a:lnTo>
+                <a:lnTo>
+                  <a:pt x="1412137" y="3092335"/>
+                </a:lnTo>
+                <a:lnTo>
+                  <a:pt x="1347949" y="3059084"/>
+                </a:lnTo>
+                <a:lnTo>
+                  <a:pt x="1285254" y="3025833"/>
+                </a:lnTo>
+                <a:lnTo>
+                  <a:pt x="1224052" y="2992582"/>
+                </a:lnTo>
+                <a:lnTo>
+                  <a:pt x="1164342" y="2959331"/>
+                </a:lnTo>
+                <a:lnTo>
+                  <a:pt x="1106125" y="2926080"/>
+                </a:lnTo>
+                <a:lnTo>
+                  <a:pt x="1049400" y="2892830"/>
+                </a:lnTo>
+                <a:lnTo>
+                  <a:pt x="994169" y="2859579"/>
+                </a:lnTo>
+                <a:lnTo>
+                  <a:pt x="940430" y="2826328"/>
+                </a:lnTo>
+                <a:lnTo>
+                  <a:pt x="888184" y="2793077"/>
+                </a:lnTo>
+                <a:lnTo>
+                  <a:pt x="837430" y="2759826"/>
+                </a:lnTo>
+                <a:lnTo>
+                  <a:pt x="788170" y="2726575"/>
+                </a:lnTo>
+                <a:lnTo>
+                  <a:pt x="740402" y="2693324"/>
+                </a:lnTo>
+                <a:lnTo>
+                  <a:pt x="694127" y="2660073"/>
+                </a:lnTo>
+                <a:lnTo>
+                  <a:pt x="649344" y="2626822"/>
+                </a:lnTo>
+                <a:lnTo>
+                  <a:pt x="606055" y="2593571"/>
+                </a:lnTo>
+                <a:lnTo>
+                  <a:pt x="564258" y="2560321"/>
+                </a:lnTo>
+                <a:lnTo>
+                  <a:pt x="523954" y="2527070"/>
+                </a:lnTo>
+                <a:lnTo>
+                  <a:pt x="485142" y="2493819"/>
+                </a:lnTo>
+                <a:lnTo>
+                  <a:pt x="447824" y="2460568"/>
+                </a:lnTo>
+                <a:lnTo>
+                  <a:pt x="411998" y="2427317"/>
+                </a:lnTo>
+                <a:lnTo>
+                  <a:pt x="377665" y="2394066"/>
+                </a:lnTo>
+                <a:lnTo>
+                  <a:pt x="344824" y="2360815"/>
+                </a:lnTo>
+                <a:lnTo>
+                  <a:pt x="313477" y="2327564"/>
+                </a:lnTo>
+                <a:lnTo>
+                  <a:pt x="283622" y="2294313"/>
+                </a:lnTo>
+                <a:lnTo>
+                  <a:pt x="255260" y="2261062"/>
+                </a:lnTo>
+                <a:lnTo>
+                  <a:pt x="228390" y="2227811"/>
+                </a:lnTo>
+                <a:lnTo>
+                  <a:pt x="203014" y="2194560"/>
+                </a:lnTo>
+                <a:lnTo>
+                  <a:pt x="179130" y="2161310"/>
+                </a:lnTo>
+                <a:lnTo>
+                  <a:pt x="156738" y="2128059"/>
+                </a:lnTo>
+                <a:lnTo>
+                  <a:pt x="135840" y="2094808"/>
+                </a:lnTo>
+                <a:lnTo>
+                  <a:pt x="116434" y="2061557"/>
+                </a:lnTo>
+                <a:lnTo>
+                  <a:pt x="98521" y="2028306"/>
+                </a:lnTo>
+                <a:lnTo>
+                  <a:pt x="82101" y="1995055"/>
+                </a:lnTo>
+                <a:lnTo>
+                  <a:pt x="67174" y="1961804"/>
+                </a:lnTo>
+                <a:lnTo>
+                  <a:pt x="53739" y="1928553"/>
+                </a:lnTo>
+                <a:lnTo>
+                  <a:pt x="41797" y="1895302"/>
+                </a:lnTo>
+                <a:lnTo>
+                  <a:pt x="31348" y="1862051"/>
+                </a:lnTo>
+                <a:lnTo>
+                  <a:pt x="22391" y="1828800"/>
+                </a:lnTo>
+                <a:lnTo>
+                  <a:pt x="14928" y="1795550"/>
+                </a:lnTo>
+                <a:lnTo>
+                  <a:pt x="8957" y="1762299"/>
+                </a:lnTo>
+                <a:lnTo>
+                  <a:pt x="4478" y="1729048"/>
+                </a:lnTo>
+                <a:lnTo>
+                  <a:pt x="1493" y="1695797"/>
+                </a:lnTo>
+                <a:lnTo>
+                  <a:pt x="0" y="1662546"/>
+                </a:lnTo>
+                <a:lnTo>
+                  <a:pt x="0" y="1629295"/>
+                </a:lnTo>
+                <a:lnTo>
+                  <a:pt x="1493" y="1596044"/>
+                </a:lnTo>
+                <a:lnTo>
+                  <a:pt x="4478" y="1562793"/>
+                </a:lnTo>
+                <a:lnTo>
+                  <a:pt x="8957" y="1529542"/>
+                </a:lnTo>
+                <a:lnTo>
+                  <a:pt x="14928" y="1496291"/>
+                </a:lnTo>
+                <a:lnTo>
+                  <a:pt x="22391" y="1463040"/>
+                </a:lnTo>
+                <a:lnTo>
+                  <a:pt x="31348" y="1429790"/>
+                </a:lnTo>
+                <a:lnTo>
+                  <a:pt x="41797" y="1396539"/>
+                </a:lnTo>
+                <a:lnTo>
+                  <a:pt x="53739" y="1363288"/>
+                </a:lnTo>
+                <a:lnTo>
+                  <a:pt x="67174" y="1330037"/>
+                </a:lnTo>
+                <a:lnTo>
+                  <a:pt x="82101" y="1296786"/>
+                </a:lnTo>
+                <a:lnTo>
+                  <a:pt x="98521" y="1263535"/>
+                </a:lnTo>
+                <a:lnTo>
+                  <a:pt x="116434" y="1230284"/>
+                </a:lnTo>
+                <a:lnTo>
+                  <a:pt x="135840" y="1197033"/>
+                </a:lnTo>
+                <a:lnTo>
+                  <a:pt x="156738" y="1163782"/>
+                </a:lnTo>
+                <a:lnTo>
+                  <a:pt x="179130" y="1130531"/>
+                </a:lnTo>
+                <a:lnTo>
+                  <a:pt x="203014" y="1097280"/>
+                </a:lnTo>
+                <a:lnTo>
+                  <a:pt x="228390" y="1064030"/>
+                </a:lnTo>
+                <a:lnTo>
+                  <a:pt x="255260" y="1030779"/>
+                </a:lnTo>
+                <a:lnTo>
+                  <a:pt x="283622" y="997528"/>
+                </a:lnTo>
+                <a:lnTo>
+                  <a:pt x="313477" y="964277"/>
+                </a:lnTo>
+                <a:lnTo>
+                  <a:pt x="344824" y="931026"/>
+                </a:lnTo>
+                <a:lnTo>
+                  <a:pt x="377665" y="897775"/>
+                </a:lnTo>
+                <a:lnTo>
+                  <a:pt x="411998" y="864524"/>
+                </a:lnTo>
+                <a:lnTo>
+                  <a:pt x="447824" y="831273"/>
+                </a:lnTo>
+                <a:lnTo>
+                  <a:pt x="485142" y="798022"/>
+                </a:lnTo>
+                <a:lnTo>
+                  <a:pt x="523954" y="764771"/>
+                </a:lnTo>
+                <a:lnTo>
+                  <a:pt x="564258" y="731520"/>
+                </a:lnTo>
+                <a:lnTo>
+                  <a:pt x="606055" y="698270"/>
+                </a:lnTo>
+                <a:lnTo>
+                  <a:pt x="649344" y="665019"/>
+                </a:lnTo>
+                <a:lnTo>
+                  <a:pt x="694127" y="631768"/>
+                </a:lnTo>
+                <a:lnTo>
+                  <a:pt x="740402" y="598517"/>
+                </a:lnTo>
+                <a:lnTo>
+                  <a:pt x="788170" y="565266"/>
+                </a:lnTo>
+                <a:lnTo>
+                  <a:pt x="837430" y="532015"/>
+                </a:lnTo>
+                <a:lnTo>
+                  <a:pt x="888184" y="498764"/>
+                </a:lnTo>
+                <a:lnTo>
+                  <a:pt x="940430" y="465513"/>
+                </a:lnTo>
+                <a:lnTo>
+                  <a:pt x="994169" y="432262"/>
+                </a:lnTo>
+                <a:lnTo>
+                  <a:pt x="1049400" y="399011"/>
+                </a:lnTo>
+                <a:lnTo>
+                  <a:pt x="1106125" y="365760"/>
+                </a:lnTo>
+                <a:lnTo>
+                  <a:pt x="1164342" y="332510"/>
+                </a:lnTo>
+                <a:lnTo>
+                  <a:pt x="1224052" y="299259"/>
+                </a:lnTo>
+                <a:lnTo>
+                  <a:pt x="1285254" y="266008"/>
+                </a:lnTo>
+                <a:lnTo>
+                  <a:pt x="1347949" y="232757"/>
+                </a:lnTo>
+                <a:lnTo>
+                  <a:pt x="1412137" y="199506"/>
+                </a:lnTo>
+                <a:lnTo>
+                  <a:pt x="1477818" y="166255"/>
+                </a:lnTo>
+                <a:lnTo>
+                  <a:pt x="1544992" y="133004"/>
+                </a:lnTo>
+                <a:lnTo>
+                  <a:pt x="1613658" y="99753"/>
+                </a:lnTo>
+                <a:lnTo>
+                  <a:pt x="1683817" y="66502"/>
+                </a:lnTo>
+                <a:lnTo>
+                  <a:pt x="1755469" y="33251"/>
+                </a:lnTo>
+                <a:lnTo>
+                  <a:pt x="1828614" y="0"/>
+                </a:lnTo>
+              </a:path>
+            </a:pathLst>
+          </a:custGeom>
+          <a:noFill/>
+          <a:ln w="38100">
+            <a:solidFill>
+              <a:srgbClr val="F2B880"/>
+            </a:solidFill>
+          </a:ln>
+          <a:effectLst/>
+        </p:spPr>
+        <p:txBody>
+          <a:bodyPr rtlCol="0" anchor="ctr"/>
+          <a:lstStyle/>
+          <a:p>
+            <a:pPr algn="ctr"/>
+          </a:p>
+        </p:txBody>
+      </p:sp>
+      <p:sp>
+        <p:nvSpPr>
+          <p:cNvPr id="51" name="C4-E03 text 49" descr="sci-ppt:o049"/>
+          <p:cNvSpPr txBox="1"/>
+          <p:nvPr/>
+        </p:nvSpPr>
+        <p:spPr>
+          <a:xfrm>
+            <a:off x="9820656" y="1543507"/>
+            <a:ext cx="1280160" cy="223900"/>
+          </a:xfrm>
+          <a:prstGeom prst="rect">
+            <a:avLst/>
+          </a:prstGeom>
+          <a:noFill/>
+          <a:effectLst/>
+        </p:spPr>
+        <p:txBody>
+          <a:bodyPr wrap="none" lIns="18288" rIns="18288" tIns="18288" bIns="18288" anchor="t">
+            <a:spAutoFit/>
+          </a:bodyPr>
+          <a:lstStyle/>
+          <a:p>
+            <a:pPr algn="l">
+              <a:spcAft>
+                <a:spcPts val="0"/>
+              </a:spcAft>
+            </a:pPr>
+            <a:r>
+              <a:rPr sz="1150" b="0" i="0">
+                <a:solidFill>
+                  <a:srgbClr val="F2B880"/>
+                </a:solidFill>
+                <a:latin typeface="Arial"/>
+              </a:rPr>
+              <a:t>stiffness: z²</a:t>
+            </a:r>
+          </a:p>
+        </p:txBody>
+      </p:sp>
+      <p:sp>
+        <p:nvSpPr>
+          <p:cNvPr id="52" name="C4-E03 text 50" descr="sci-ppt:o050"/>
+          <p:cNvSpPr txBox="1"/>
+          <p:nvPr/>
+        </p:nvSpPr>
+        <p:spPr>
+          <a:xfrm>
+            <a:off x="6583680" y="5440680"/>
+            <a:ext cx="5212080" cy="417576"/>
+          </a:xfrm>
+          <a:prstGeom prst="rect">
+            <a:avLst/>
+          </a:prstGeom>
+          <a:noFill/>
+          <a:effectLst/>
+        </p:spPr>
+        <p:txBody>
+          <a:bodyPr wrap="none" lIns="18288" rIns="18288" tIns="18288" bIns="18288" anchor="t">
+            <a:spAutoFit/>
+          </a:bodyPr>
+          <a:lstStyle/>
+          <a:p>
+            <a:pPr algn="l">
+              <a:spcAft>
+                <a:spcPts val="0"/>
+              </a:spcAft>
+            </a:pPr>
+            <a:r>
+              <a:rPr sz="1200" b="0" i="0">
+                <a:solidFill>
+                  <a:srgbClr val="E7F0F3"/>
+                </a:solidFill>
+                <a:latin typeface="Arial"/>
+              </a:rPr>
+              <a:t>h_f = 10 µm, E_f = 2 GPa, ν_f = 0.35: m_A = 23.300 g/m², D_f =</a:t>
+            </a:r>
+          </a:p>
+          <a:p>
+            <a:pPr algn="l">
+              <a:spcAft>
+                <a:spcPts val="0"/>
+              </a:spcAft>
+            </a:pPr>
+            <a:r>
+              <a:rPr sz="1200" b="0" i="0">
+                <a:solidFill>
+                  <a:srgbClr val="E7F0F3"/>
+                </a:solidFill>
+                <a:latin typeface="Arial"/>
+              </a:rPr>
+              <a:t>1.899e-07 N m.</a:t>
+            </a:r>
+          </a:p>
+        </p:txBody>
+      </p:sp>
+      <p:sp>
+        <p:nvSpPr>
+          <p:cNvPr id="53" name="C4-E03 text 51" descr="sci-ppt:o051"/>
+          <p:cNvSpPr txBox="1"/>
+          <p:nvPr/>
+        </p:nvSpPr>
+        <p:spPr>
+          <a:xfrm>
+            <a:off x="6583680" y="5989320"/>
+            <a:ext cx="5212080" cy="417576"/>
+          </a:xfrm>
+          <a:prstGeom prst="rect">
+            <a:avLst/>
+          </a:prstGeom>
+          <a:noFill/>
+          <a:effectLst/>
+        </p:spPr>
+        <p:txBody>
+          <a:bodyPr wrap="none" lIns="18288" rIns="18288" tIns="18288" bIns="18288" anchor="t">
+            <a:spAutoFit/>
+          </a:bodyPr>
+          <a:lstStyle/>
+          <a:p>
+            <a:pPr algn="l">
+              <a:spcAft>
+                <a:spcPts val="0"/>
+              </a:spcAft>
+            </a:pPr>
+            <a:r>
+              <a:rPr sz="1200" b="0" i="0">
+                <a:solidFill>
+                  <a:srgbClr val="F2B880"/>
+                </a:solidFill>
+                <a:latin typeface="Arial"/>
+              </a:rPr>
+              <a:t>Outer fibres dominate bending: thickness enters as h³, inertia</a:t>
+            </a:r>
+          </a:p>
+          <a:p>
+            <a:pPr algn="l">
+              <a:spcAft>
+                <a:spcPts val="0"/>
+              </a:spcAft>
+            </a:pPr>
+            <a:r>
+              <a:rPr sz="1200" b="0" i="0">
+                <a:solidFill>
+                  <a:srgbClr val="F2B880"/>
+                </a:solidFill>
+                <a:latin typeface="Arial"/>
+              </a:rPr>
+              <a:t>only as h.</a:t>
+            </a:r>
+          </a:p>
+        </p:txBody>
+      </p:sp>
+      <p:sp>
+        <p:nvSpPr>
+          <p:cNvPr id="54" name="C4-E03 text 52" descr="sci-ppt:o052"/>
+          <p:cNvSpPr txBox="1"/>
+          <p:nvPr/>
+        </p:nvSpPr>
+        <p:spPr>
+          <a:xfrm>
+            <a:off x="320040" y="6510528"/>
+            <a:ext cx="11521440" cy="200660"/>
+          </a:xfrm>
+          <a:prstGeom prst="rect">
+            <a:avLst/>
+          </a:prstGeom>
+          <a:noFill/>
+          <a:effectLst/>
+        </p:spPr>
+        <p:txBody>
+          <a:bodyPr wrap="none" lIns="18288" rIns="18288" tIns="18288" bIns="18288" anchor="t">
             <a:spAutoFit/>
           </a:bodyPr>
           <a:lstStyle/>
@@ -3693,7 +5054,7 @@
                 </a:solidFill>
                 <a:latin typeface="Arial"/>
               </a:rPr>
-              <a:t>Model schematic; geometry is not to scale.</a:t>
+              <a:t>Plate parameters of Eq. C4-E03 (ρ_f = 2330 kg/m³ for the film mass).</a:t>
             </a:r>
           </a:p>
         </p:txBody>
